--- a/curriculum/M01/W02/L03/slides.pptx
+++ b/curriculum/M01/W02/L03/slides.pptx
@@ -6597,11 +6597,40 @@
                 <a:ea typeface="Malgun Gothic"/>
                 <a:cs typeface="Malgun Gothic"/>
               </a:rPr>
-              <a:t>(2n): 관의 바깥쪽 기저막에 붙어 있는 줄기세포다. Mitosis로 분열해 하나는 줄기세포로 남고 하나는 다음 단계로 간다. 이 때문에 줄기세포 풀이 소모되지 않는다. 2. </a:t>
-            </a:r>
+              <a:t>(2n): 관의 바깥쪽 기저막에 붙어 있는 줄기세포다. Mitosis로 분열해 하나는 줄기세포로 남고 하나는 다음 단계로 간다. 이 때문에 줄기세포 풀이 소모되지 않는다.</a:t>
+            </a:r>
+          </a:p>
+          <a:p>
+            <a:pPr>
+              <a:spcAft>
+                <a:spcPts val="900"/>
+              </a:spcAft>
+            </a:pPr>
             <a:r>
               <a:rPr sz="1400" b="1" i="0">
                 <a:solidFill>
+                  <a:srgbClr val="F2B705"/>
+                </a:solidFill>
+                <a:latin typeface="Malgun Gothic"/>
+                <a:ea typeface="Malgun Gothic"/>
+                <a:cs typeface="Malgun Gothic"/>
+              </a:rPr>
+              <a:t>•  </a:t>
+            </a:r>
+            <a:r>
+              <a:rPr sz="1400" b="0" i="0">
+                <a:solidFill>
+                  <a:srgbClr val="11202B"/>
+                </a:solidFill>
+                <a:latin typeface="Malgun Gothic"/>
+                <a:ea typeface="Malgun Gothic"/>
+                <a:cs typeface="Malgun Gothic"/>
+              </a:rPr>
+              <a:t>2. </a:t>
+            </a:r>
+            <a:r>
+              <a:rPr sz="1400" b="1" i="0">
+                <a:solidFill>
                   <a:srgbClr val="11202B"/>
                 </a:solidFill>
                 <a:latin typeface="Malgun Gothic"/>
@@ -6619,11 +6648,40 @@
                 <a:ea typeface="Malgun Gothic"/>
                 <a:cs typeface="Malgun Gothic"/>
               </a:rPr>
-              <a:t>(2n, DNA는 4n): Meiosis I에 들어간다. 3. </a:t>
-            </a:r>
+              <a:t>(2n, DNA는 4n): Meiosis I에 들어간다.</a:t>
+            </a:r>
+          </a:p>
+          <a:p>
+            <a:pPr>
+              <a:spcAft>
+                <a:spcPts val="900"/>
+              </a:spcAft>
+            </a:pPr>
             <a:r>
               <a:rPr sz="1400" b="1" i="0">
                 <a:solidFill>
+                  <a:srgbClr val="F2B705"/>
+                </a:solidFill>
+                <a:latin typeface="Malgun Gothic"/>
+                <a:ea typeface="Malgun Gothic"/>
+                <a:cs typeface="Malgun Gothic"/>
+              </a:rPr>
+              <a:t>•  </a:t>
+            </a:r>
+            <a:r>
+              <a:rPr sz="1400" b="0" i="0">
+                <a:solidFill>
+                  <a:srgbClr val="11202B"/>
+                </a:solidFill>
+                <a:latin typeface="Malgun Gothic"/>
+                <a:ea typeface="Malgun Gothic"/>
+                <a:cs typeface="Malgun Gothic"/>
+              </a:rPr>
+              <a:t>3. </a:t>
+            </a:r>
+            <a:r>
+              <a:rPr sz="1400" b="1" i="0">
+                <a:solidFill>
                   <a:srgbClr val="11202B"/>
                 </a:solidFill>
                 <a:latin typeface="Malgun Gothic"/>
@@ -6641,11 +6699,40 @@
                 <a:ea typeface="Malgun Gothic"/>
                 <a:cs typeface="Malgun Gothic"/>
               </a:rPr>
-              <a:t>(n, DNA는 2n): Meiosis I의 결과로 두 개가 생긴다. 바로 Meiosis II에 들어간다. 4. </a:t>
-            </a:r>
+              <a:t>(n, DNA는 2n): Meiosis I의 결과로 두 개가 생긴다. 바로 Meiosis II에 들어간다.</a:t>
+            </a:r>
+          </a:p>
+          <a:p>
+            <a:pPr>
+              <a:spcAft>
+                <a:spcPts val="900"/>
+              </a:spcAft>
+            </a:pPr>
             <a:r>
               <a:rPr sz="1400" b="1" i="0">
                 <a:solidFill>
+                  <a:srgbClr val="F2B705"/>
+                </a:solidFill>
+                <a:latin typeface="Malgun Gothic"/>
+                <a:ea typeface="Malgun Gothic"/>
+                <a:cs typeface="Malgun Gothic"/>
+              </a:rPr>
+              <a:t>•  </a:t>
+            </a:r>
+            <a:r>
+              <a:rPr sz="1400" b="0" i="0">
+                <a:solidFill>
+                  <a:srgbClr val="11202B"/>
+                </a:solidFill>
+                <a:latin typeface="Malgun Gothic"/>
+                <a:ea typeface="Malgun Gothic"/>
+                <a:cs typeface="Malgun Gothic"/>
+              </a:rPr>
+              <a:t>4. </a:t>
+            </a:r>
+            <a:r>
+              <a:rPr sz="1400" b="1" i="0">
+                <a:solidFill>
                   <a:srgbClr val="11202B"/>
                 </a:solidFill>
                 <a:latin typeface="Malgun Gothic"/>
@@ -6663,7 +6750,36 @@
                 <a:ea typeface="Malgun Gothic"/>
                 <a:cs typeface="Malgun Gothic"/>
               </a:rPr>
-              <a:t>(n): Meiosis II의 결과로 네 개가 생긴다. 아직 정자의 모양이 아니다. 5. </a:t>
+              <a:t>(n): Meiosis II의 결과로 네 개가 생긴다. 아직 정자의 모양이 아니다.</a:t>
+            </a:r>
+          </a:p>
+          <a:p>
+            <a:pPr>
+              <a:spcAft>
+                <a:spcPts val="900"/>
+              </a:spcAft>
+            </a:pPr>
+            <a:r>
+              <a:rPr sz="1400" b="1" i="0">
+                <a:solidFill>
+                  <a:srgbClr val="F2B705"/>
+                </a:solidFill>
+                <a:latin typeface="Malgun Gothic"/>
+                <a:ea typeface="Malgun Gothic"/>
+                <a:cs typeface="Malgun Gothic"/>
+              </a:rPr>
+              <a:t>•  </a:t>
+            </a:r>
+            <a:r>
+              <a:rPr sz="1400" b="0" i="0">
+                <a:solidFill>
+                  <a:srgbClr val="11202B"/>
+                </a:solidFill>
+                <a:latin typeface="Malgun Gothic"/>
+                <a:ea typeface="Malgun Gothic"/>
+                <a:cs typeface="Malgun Gothic"/>
+              </a:rPr>
+              <a:t>5. </a:t>
             </a:r>
             <a:r>
               <a:rPr sz="1400" b="1" i="0">
@@ -13394,95 +13510,7 @@
                 <a:ea typeface="Malgun Gothic"/>
                 <a:cs typeface="Malgun Gothic"/>
               </a:rPr>
-              <a:t>: 여러 follicle이 발달을 시작하고, 그중 하나가 선택되어(dominant follicle) 성숙한다. FSH가 이 성장을 이끌고, 자라는 follicle이 estrogen을 점점 많이 분비한다. 선택되지 않은 follicle들은 퇴화한다. 2. </a:t>
-            </a:r>
-            <a:r>
-              <a:rPr sz="1400" b="1" i="0">
-                <a:solidFill>
-                  <a:srgbClr val="11202B"/>
-                </a:solidFill>
-                <a:latin typeface="Malgun Gothic"/>
-                <a:ea typeface="Malgun Gothic"/>
-                <a:cs typeface="Malgun Gothic"/>
-              </a:rPr>
-              <a:t>배란 (약 14일)</a:t>
-            </a:r>
-            <a:r>
-              <a:rPr sz="1400" b="0" i="0">
-                <a:solidFill>
-                  <a:srgbClr val="11202B"/>
-                </a:solidFill>
-                <a:latin typeface="Malgun Gothic"/>
-                <a:ea typeface="Malgun Gothic"/>
-                <a:cs typeface="Malgun Gothic"/>
-              </a:rPr>
-              <a:t>: LH 급증이 일어나 follicle이 터지고 난자가 방출된다. 동시에 멈춰 있던 meiosis I이 완료된다. 3. </a:t>
-            </a:r>
-            <a:r>
-              <a:rPr sz="1400" b="1" i="0">
-                <a:solidFill>
-                  <a:srgbClr val="11202B"/>
-                </a:solidFill>
-                <a:latin typeface="Malgun Gothic"/>
-                <a:ea typeface="Malgun Gothic"/>
-                <a:cs typeface="Malgun Gothic"/>
-              </a:rPr>
-              <a:t>Luteal phase (15~28일)</a:t>
-            </a:r>
-            <a:r>
-              <a:rPr sz="1400" b="0" i="0">
-                <a:solidFill>
-                  <a:srgbClr val="11202B"/>
-                </a:solidFill>
-                <a:latin typeface="Malgun Gothic"/>
-                <a:ea typeface="Malgun Gothic"/>
-                <a:cs typeface="Malgun Gothic"/>
-              </a:rPr>
-              <a:t>: 터진 follicle의 잔해가 </a:t>
-            </a:r>
-            <a:r>
-              <a:rPr sz="1400" b="1" i="0">
-                <a:solidFill>
-                  <a:srgbClr val="11202B"/>
-                </a:solidFill>
-                <a:latin typeface="Malgun Gothic"/>
-                <a:ea typeface="Malgun Gothic"/>
-                <a:cs typeface="Malgun Gothic"/>
-              </a:rPr>
-              <a:t>corpus luteum(황체)</a:t>
-            </a:r>
-            <a:r>
-              <a:rPr sz="1400" b="0" i="0">
-                <a:solidFill>
-                  <a:srgbClr val="11202B"/>
-                </a:solidFill>
-                <a:latin typeface="Malgun Gothic"/>
-                <a:ea typeface="Malgun Gothic"/>
-                <a:cs typeface="Malgun Gothic"/>
-              </a:rPr>
-              <a:t> 으로 바뀌어 </a:t>
-            </a:r>
-            <a:r>
-              <a:rPr sz="1400" b="1" i="0">
-                <a:solidFill>
-                  <a:srgbClr val="11202B"/>
-                </a:solidFill>
-                <a:latin typeface="Malgun Gothic"/>
-                <a:ea typeface="Malgun Gothic"/>
-                <a:cs typeface="Malgun Gothic"/>
-              </a:rPr>
-              <a:t>progesterone</a:t>
-            </a:r>
-            <a:r>
-              <a:rPr sz="1400" b="0" i="0">
-                <a:solidFill>
-                  <a:srgbClr val="11202B"/>
-                </a:solidFill>
-                <a:latin typeface="Malgun Gothic"/>
-                <a:ea typeface="Malgun Gothic"/>
-                <a:cs typeface="Malgun Gothic"/>
-              </a:rPr>
-              <a:t>과 estrogen을 분비한다. 수정이 없으면 약 14일 뒤 황체가 퇴화해 두 호르몬이 급감한다.</a:t>
+              <a:t>: 여러 follicle이 발달을 시작하고, 그중 하나가 선택되어(dominant follicle) 성숙한다. FSH가 이 성장을 이끌고, 자라는 follicle이 estrogen을 점점 많이 분비한다. 선택되지 않은 follicle들은 퇴화한다.</a:t>
             </a:r>
           </a:p>
           <a:p>
@@ -13511,7 +13539,29 @@
                 <a:ea typeface="Malgun Gothic"/>
                 <a:cs typeface="Malgun Gothic"/>
               </a:rPr>
-              <a:t>Luteal phase의 길이가 약 14일로 거의 일정하다는 점에 주의해야 한다. 주기 길이가 사람마다 다른 것은 주로 follicular phase의 길이가 다르기 때문이다.</a:t>
+              <a:t>2. </a:t>
+            </a:r>
+            <a:r>
+              <a:rPr sz="1400" b="1" i="0">
+                <a:solidFill>
+                  <a:srgbClr val="11202B"/>
+                </a:solidFill>
+                <a:latin typeface="Malgun Gothic"/>
+                <a:ea typeface="Malgun Gothic"/>
+                <a:cs typeface="Malgun Gothic"/>
+              </a:rPr>
+              <a:t>배란 (약 14일)</a:t>
+            </a:r>
+            <a:r>
+              <a:rPr sz="1400" b="0" i="0">
+                <a:solidFill>
+                  <a:srgbClr val="11202B"/>
+                </a:solidFill>
+                <a:latin typeface="Malgun Gothic"/>
+                <a:ea typeface="Malgun Gothic"/>
+                <a:cs typeface="Malgun Gothic"/>
+              </a:rPr>
+              <a:t>: LH 급증이 일어나 follicle이 터지고 난자가 방출된다. 동시에 멈춰 있던 meiosis I이 완료된다.</a:t>
             </a:r>
           </a:p>
           <a:p>
@@ -13532,6 +13582,17 @@
               <a:t>•  </a:t>
             </a:r>
             <a:r>
+              <a:rPr sz="1400" b="0" i="0">
+                <a:solidFill>
+                  <a:srgbClr val="11202B"/>
+                </a:solidFill>
+                <a:latin typeface="Malgun Gothic"/>
+                <a:ea typeface="Malgun Gothic"/>
+                <a:cs typeface="Malgun Gothic"/>
+              </a:rPr>
+              <a:t>3. </a:t>
+            </a:r>
+            <a:r>
               <a:rPr sz="1400" b="1" i="0">
                 <a:solidFill>
                   <a:srgbClr val="11202B"/>
@@ -13540,7 +13601,7 @@
                 <a:ea typeface="Malgun Gothic"/>
                 <a:cs typeface="Malgun Gothic"/>
               </a:rPr>
-              <a:t>자궁 주기</a:t>
+              <a:t>Luteal phase (15~28일)</a:t>
             </a:r>
             <a:r>
               <a:rPr sz="1400" b="0" i="0">
@@ -13551,7 +13612,51 @@
                 <a:ea typeface="Malgun Gothic"/>
                 <a:cs typeface="Malgun Gothic"/>
               </a:rPr>
-              <a:t>는 호르몬에 대한 반응이다.</a:t>
+              <a:t>: 터진 follicle의 잔해가 </a:t>
+            </a:r>
+            <a:r>
+              <a:rPr sz="1400" b="1" i="0">
+                <a:solidFill>
+                  <a:srgbClr val="11202B"/>
+                </a:solidFill>
+                <a:latin typeface="Malgun Gothic"/>
+                <a:ea typeface="Malgun Gothic"/>
+                <a:cs typeface="Malgun Gothic"/>
+              </a:rPr>
+              <a:t>corpus luteum(황체)</a:t>
+            </a:r>
+            <a:r>
+              <a:rPr sz="1400" b="0" i="0">
+                <a:solidFill>
+                  <a:srgbClr val="11202B"/>
+                </a:solidFill>
+                <a:latin typeface="Malgun Gothic"/>
+                <a:ea typeface="Malgun Gothic"/>
+                <a:cs typeface="Malgun Gothic"/>
+              </a:rPr>
+              <a:t> 으로 바뀌어 </a:t>
+            </a:r>
+            <a:r>
+              <a:rPr sz="1400" b="1" i="0">
+                <a:solidFill>
+                  <a:srgbClr val="11202B"/>
+                </a:solidFill>
+                <a:latin typeface="Malgun Gothic"/>
+                <a:ea typeface="Malgun Gothic"/>
+                <a:cs typeface="Malgun Gothic"/>
+              </a:rPr>
+              <a:t>progesterone</a:t>
+            </a:r>
+            <a:r>
+              <a:rPr sz="1400" b="0" i="0">
+                <a:solidFill>
+                  <a:srgbClr val="11202B"/>
+                </a:solidFill>
+                <a:latin typeface="Malgun Gothic"/>
+                <a:ea typeface="Malgun Gothic"/>
+                <a:cs typeface="Malgun Gothic"/>
+              </a:rPr>
+              <a:t>과 estrogen을 분비한다. 수정이 없으면 약 14일 뒤 황체가 퇴화해 두 호르몬이 급감한다.</a:t>
             </a:r>
           </a:p>
           <a:p>
@@ -13580,6 +13685,75 @@
                 <a:ea typeface="Malgun Gothic"/>
                 <a:cs typeface="Malgun Gothic"/>
               </a:rPr>
+              <a:t>Luteal phase의 길이가 약 14일로 거의 일정하다는 점에 주의해야 한다. 주기 길이가 사람마다 다른 것은 주로 follicular phase의 길이가 다르기 때문이다.</a:t>
+            </a:r>
+          </a:p>
+          <a:p>
+            <a:pPr>
+              <a:spcAft>
+                <a:spcPts val="900"/>
+              </a:spcAft>
+            </a:pPr>
+            <a:r>
+              <a:rPr sz="1400" b="1" i="0">
+                <a:solidFill>
+                  <a:srgbClr val="F2B705"/>
+                </a:solidFill>
+                <a:latin typeface="Malgun Gothic"/>
+                <a:ea typeface="Malgun Gothic"/>
+                <a:cs typeface="Malgun Gothic"/>
+              </a:rPr>
+              <a:t>•  </a:t>
+            </a:r>
+            <a:r>
+              <a:rPr sz="1400" b="1" i="0">
+                <a:solidFill>
+                  <a:srgbClr val="11202B"/>
+                </a:solidFill>
+                <a:latin typeface="Malgun Gothic"/>
+                <a:ea typeface="Malgun Gothic"/>
+                <a:cs typeface="Malgun Gothic"/>
+              </a:rPr>
+              <a:t>자궁 주기</a:t>
+            </a:r>
+            <a:r>
+              <a:rPr sz="1400" b="0" i="0">
+                <a:solidFill>
+                  <a:srgbClr val="11202B"/>
+                </a:solidFill>
+                <a:latin typeface="Malgun Gothic"/>
+                <a:ea typeface="Malgun Gothic"/>
+                <a:cs typeface="Malgun Gothic"/>
+              </a:rPr>
+              <a:t>는 호르몬에 대한 반응이다.</a:t>
+            </a:r>
+          </a:p>
+          <a:p>
+            <a:pPr>
+              <a:spcAft>
+                <a:spcPts val="900"/>
+              </a:spcAft>
+            </a:pPr>
+            <a:r>
+              <a:rPr sz="1400" b="1" i="0">
+                <a:solidFill>
+                  <a:srgbClr val="F2B705"/>
+                </a:solidFill>
+                <a:latin typeface="Malgun Gothic"/>
+                <a:ea typeface="Malgun Gothic"/>
+                <a:cs typeface="Malgun Gothic"/>
+              </a:rPr>
+              <a:t>•  </a:t>
+            </a:r>
+            <a:r>
+              <a:rPr sz="1400" b="0" i="0">
+                <a:solidFill>
+                  <a:srgbClr val="11202B"/>
+                </a:solidFill>
+                <a:latin typeface="Malgun Gothic"/>
+                <a:ea typeface="Malgun Gothic"/>
+                <a:cs typeface="Malgun Gothic"/>
+              </a:rPr>
               <a:t>1. </a:t>
             </a:r>
             <a:r>
@@ -13602,11 +13776,40 @@
                 <a:ea typeface="Malgun Gothic"/>
                 <a:cs typeface="Malgun Gothic"/>
               </a:rPr>
-              <a:t>: 이전 주기의 황체가 퇴화해 progesterone과 estrogen이 떨어진 결과로 자궁내막이 떨어져 나간다. 2. </a:t>
-            </a:r>
+              <a:t>: 이전 주기의 황체가 퇴화해 progesterone과 estrogen이 떨어진 결과로 자궁내막이 떨어져 나간다.</a:t>
+            </a:r>
+          </a:p>
+          <a:p>
+            <a:pPr>
+              <a:spcAft>
+                <a:spcPts val="900"/>
+              </a:spcAft>
+            </a:pPr>
             <a:r>
               <a:rPr sz="1400" b="1" i="0">
                 <a:solidFill>
+                  <a:srgbClr val="F2B705"/>
+                </a:solidFill>
+                <a:latin typeface="Malgun Gothic"/>
+                <a:ea typeface="Malgun Gothic"/>
+                <a:cs typeface="Malgun Gothic"/>
+              </a:rPr>
+              <a:t>•  </a:t>
+            </a:r>
+            <a:r>
+              <a:rPr sz="1400" b="0" i="0">
+                <a:solidFill>
+                  <a:srgbClr val="11202B"/>
+                </a:solidFill>
+                <a:latin typeface="Malgun Gothic"/>
+                <a:ea typeface="Malgun Gothic"/>
+                <a:cs typeface="Malgun Gothic"/>
+              </a:rPr>
+              <a:t>2. </a:t>
+            </a:r>
+            <a:r>
+              <a:rPr sz="1400" b="1" i="0">
+                <a:solidFill>
                   <a:srgbClr val="11202B"/>
                 </a:solidFill>
                 <a:latin typeface="Malgun Gothic"/>
@@ -13624,7 +13827,36 @@
                 <a:ea typeface="Malgun Gothic"/>
                 <a:cs typeface="Malgun Gothic"/>
               </a:rPr>
-              <a:t>: Follicle에서 나오는 estrogen이 자궁내막을 다시 두껍게 만들고 샘과 혈관을 늘린다. 3. </a:t>
+              <a:t>: Follicle에서 나오는 estrogen이 자궁내막을 다시 두껍게 만들고 샘과 혈관을 늘린다.</a:t>
+            </a:r>
+          </a:p>
+          <a:p>
+            <a:pPr>
+              <a:spcAft>
+                <a:spcPts val="900"/>
+              </a:spcAft>
+            </a:pPr>
+            <a:r>
+              <a:rPr sz="1400" b="1" i="0">
+                <a:solidFill>
+                  <a:srgbClr val="F2B705"/>
+                </a:solidFill>
+                <a:latin typeface="Malgun Gothic"/>
+                <a:ea typeface="Malgun Gothic"/>
+                <a:cs typeface="Malgun Gothic"/>
+              </a:rPr>
+              <a:t>•  </a:t>
+            </a:r>
+            <a:r>
+              <a:rPr sz="1400" b="0" i="0">
+                <a:solidFill>
+                  <a:srgbClr val="11202B"/>
+                </a:solidFill>
+                <a:latin typeface="Malgun Gothic"/>
+                <a:ea typeface="Malgun Gothic"/>
+                <a:cs typeface="Malgun Gothic"/>
+              </a:rPr>
+              <a:t>3. </a:t>
             </a:r>
             <a:r>
               <a:rPr sz="1400" b="1" i="0">
@@ -17495,11 +17727,40 @@
                 <a:ea typeface="Malgun Gothic"/>
                 <a:cs typeface="Malgun Gothic"/>
               </a:rPr>
-              <a:t>: Meiosis I의 전기에 상동염색체가 짝지어 일부를 서로 교환한다. 한 염색체 안에서 부모 양쪽의 대립유전자가 섞인다. 2. </a:t>
-            </a:r>
+              <a:t>: Meiosis I의 전기에 상동염색체가 짝지어 일부를 서로 교환한다. 한 염색체 안에서 부모 양쪽의 대립유전자가 섞인다.</a:t>
+            </a:r>
+          </a:p>
+          <a:p>
+            <a:pPr>
+              <a:spcAft>
+                <a:spcPts val="900"/>
+              </a:spcAft>
+            </a:pPr>
             <a:r>
               <a:rPr sz="1400" b="1" i="0">
                 <a:solidFill>
+                  <a:srgbClr val="F2B705"/>
+                </a:solidFill>
+                <a:latin typeface="Malgun Gothic"/>
+                <a:ea typeface="Malgun Gothic"/>
+                <a:cs typeface="Malgun Gothic"/>
+              </a:rPr>
+              <a:t>•  </a:t>
+            </a:r>
+            <a:r>
+              <a:rPr sz="1400" b="0" i="0">
+                <a:solidFill>
+                  <a:srgbClr val="11202B"/>
+                </a:solidFill>
+                <a:latin typeface="Malgun Gothic"/>
+                <a:ea typeface="Malgun Gothic"/>
+                <a:cs typeface="Malgun Gothic"/>
+              </a:rPr>
+              <a:t>2. </a:t>
+            </a:r>
+            <a:r>
+              <a:rPr sz="1400" b="1" i="0">
+                <a:solidFill>
                   <a:srgbClr val="11202B"/>
                 </a:solidFill>
                 <a:latin typeface="Malgun Gothic"/>
@@ -17517,7 +17778,36 @@
                 <a:ea typeface="Malgun Gothic"/>
                 <a:cs typeface="Malgun Gothic"/>
               </a:rPr>
-              <a:t>: 각 상동염색체 쌍이 서로 독립적으로 양극으로 나뉜다. 23쌍이 있으므로 2²³, 약 840만 가지 조합이 가능하다. 3. </a:t>
+              <a:t>: 각 상동염색체 쌍이 서로 독립적으로 양극으로 나뉜다. 23쌍이 있으므로 2²³, 약 840만 가지 조합이 가능하다.</a:t>
+            </a:r>
+          </a:p>
+          <a:p>
+            <a:pPr>
+              <a:spcAft>
+                <a:spcPts val="900"/>
+              </a:spcAft>
+            </a:pPr>
+            <a:r>
+              <a:rPr sz="1400" b="1" i="0">
+                <a:solidFill>
+                  <a:srgbClr val="F2B705"/>
+                </a:solidFill>
+                <a:latin typeface="Malgun Gothic"/>
+                <a:ea typeface="Malgun Gothic"/>
+                <a:cs typeface="Malgun Gothic"/>
+              </a:rPr>
+              <a:t>•  </a:t>
+            </a:r>
+            <a:r>
+              <a:rPr sz="1400" b="0" i="0">
+                <a:solidFill>
+                  <a:srgbClr val="11202B"/>
+                </a:solidFill>
+                <a:latin typeface="Malgun Gothic"/>
+                <a:ea typeface="Malgun Gothic"/>
+                <a:cs typeface="Malgun Gothic"/>
+              </a:rPr>
+              <a:t>3. </a:t>
             </a:r>
             <a:r>
               <a:rPr sz="1400" b="1" i="0">

--- a/curriculum/M01/W02/L03/slides.pptx
+++ b/curriculum/M01/W02/L03/slides.pptx
@@ -15885,7 +15885,7 @@
                 <a:ea typeface="Malgun Gothic"/>
                 <a:cs typeface="Malgun Gothic"/>
               </a:rPr>
-              <a:t>M01-W02-L02 내분비계 요약 — 시상하부–뇌하수체 축, 음성·양성 되먹임, steroid 호르몬의 성질</a:t>
+              <a:t>M01-W02-L02 내분비계 요약: 호르몬과 되먹임 — 시상하부–뇌하수체 축, 음성·양성 되먹임, steroid 호르몬의 성질</a:t>
             </a:r>
           </a:p>
           <a:p>
@@ -15943,7 +15943,7 @@
                 <a:ea typeface="Malgun Gothic"/>
                 <a:cs typeface="Malgun Gothic"/>
               </a:rPr>
-              <a:t>M01-W01-L01 순환계 요약 — 호르몬의 혈중 운반</a:t>
+              <a:t>M01-W01-L01 순환계 요약: 심장·혈관·혈류와 항상성 — 호르몬의 혈중 운반</a:t>
             </a:r>
           </a:p>
         </p:txBody>
